--- a/src/ppt-super/assets/tpl-16-kpi-dashboard/template.pptx
+++ b/src/ppt-super/assets/tpl-16-kpi-dashboard/template.pptx
@@ -3136,7 +3136,14 @@
           <a:bodyPr rtlCol="0" anchor="ctr"/>
           <a:lstStyle/>
           <a:p>
-            <a:pPr algn="ctr"/>
+            <a:pPr algn="ctr">
+              <a:spcBef>
+                <a:spcPts val="0"/>
+              </a:spcBef>
+              <a:spcAft>
+                <a:spcPts val="0"/>
+              </a:spcAft>
+            </a:pPr>
           </a:p>
         </p:txBody>
       </p:sp>
@@ -3166,14 +3173,21 @@
               <a:lnSpc>
                 <a:spcPct val="112000"/>
               </a:lnSpc>
+              <a:spcBef>
+                <a:spcPts val="0"/>
+              </a:spcBef>
+              <a:spcAft>
+                <a:spcPts val="0"/>
+              </a:spcAft>
             </a:pPr>
             <a:r>
-              <a:rPr sz="1400" b="1" i="0">
+              <a:rPr sz="1400" b="1" i="0" lang="zh-CN" altLang="zh-CN">
                 <a:solidFill>
                   <a:srgbClr val="FFFFFF"/>
                 </a:solidFill>
                 <a:latin typeface="Microsoft YaHei"/>
                 <a:ea typeface="Microsoft YaHei"/>
+                <a:cs typeface="Microsoft YaHei"/>
               </a:rPr>
               <a:t>试点成效</a:t>
             </a:r>
@@ -3206,14 +3220,21 @@
               <a:lnSpc>
                 <a:spcPct val="112000"/>
               </a:lnSpc>
+              <a:spcBef>
+                <a:spcPts val="0"/>
+              </a:spcBef>
+              <a:spcAft>
+                <a:spcPts val="0"/>
+              </a:spcAft>
             </a:pPr>
             <a:r>
-              <a:rPr sz="2200" b="1" i="0">
+              <a:rPr sz="2200" b="1" i="0" lang="zh-CN" altLang="zh-CN">
                 <a:solidFill>
                   <a:srgbClr val="B90A0A"/>
                 </a:solidFill>
                 <a:latin typeface="Microsoft YaHei"/>
                 <a:ea typeface="Microsoft YaHei"/>
+                <a:cs typeface="Microsoft YaHei"/>
               </a:rPr>
               <a:t>智能体试点季度成效: 工单自动处理率达 86%, 运维人力投入下降 28%</a:t>
             </a:r>
@@ -3300,7 +3321,14 @@
           <a:bodyPr rtlCol="0" anchor="ctr"/>
           <a:lstStyle/>
           <a:p>
-            <a:pPr algn="ctr"/>
+            <a:pPr algn="ctr">
+              <a:spcBef>
+                <a:spcPts val="0"/>
+              </a:spcBef>
+              <a:spcAft>
+                <a:spcPts val="0"/>
+              </a:spcAft>
+            </a:pPr>
           </a:p>
         </p:txBody>
       </p:sp>
@@ -3312,8 +3340,8 @@
         </p:nvSpPr>
         <p:spPr>
           <a:xfrm>
-            <a:off x="482600" y="914400"/>
-            <a:ext cx="2540000" cy="177800"/>
+            <a:off x="482600" y="897191"/>
+            <a:ext cx="2540000" cy="212217"/>
           </a:xfrm>
           <a:prstGeom prst="rect">
             <a:avLst/>
@@ -3330,14 +3358,21 @@
               <a:lnSpc>
                 <a:spcPct val="112000"/>
               </a:lnSpc>
+              <a:spcBef>
+                <a:spcPts val="0"/>
+              </a:spcBef>
+              <a:spcAft>
+                <a:spcPts val="0"/>
+              </a:spcAft>
             </a:pPr>
             <a:r>
-              <a:rPr sz="1200" b="0" i="0">
+              <a:rPr sz="1200" b="0" i="0" lang="zh-CN" altLang="zh-CN">
                 <a:solidFill>
                   <a:srgbClr val="595959"/>
                 </a:solidFill>
                 <a:latin typeface="Microsoft YaHei"/>
                 <a:ea typeface="Microsoft YaHei"/>
+                <a:cs typeface="Microsoft YaHei"/>
               </a:rPr>
               <a:t>工单自动处理率</a:t>
             </a:r>
@@ -3352,8 +3387,8 @@
         </p:nvSpPr>
         <p:spPr>
           <a:xfrm>
-            <a:off x="482600" y="1104900"/>
-            <a:ext cx="2540000" cy="431800"/>
+            <a:off x="482600" y="1072324"/>
+            <a:ext cx="2540000" cy="496951"/>
           </a:xfrm>
           <a:prstGeom prst="rect">
             <a:avLst/>
@@ -3370,14 +3405,21 @@
               <a:lnSpc>
                 <a:spcPct val="112000"/>
               </a:lnSpc>
+              <a:spcBef>
+                <a:spcPts val="0"/>
+              </a:spcBef>
+              <a:spcAft>
+                <a:spcPts val="0"/>
+              </a:spcAft>
             </a:pPr>
             <a:r>
-              <a:rPr sz="3000" b="1" i="0">
+              <a:rPr sz="3000" b="1" i="0" lang="zh-CN" altLang="zh-CN">
                 <a:solidFill>
                   <a:srgbClr val="1F4E79"/>
                 </a:solidFill>
                 <a:latin typeface="Microsoft YaHei"/>
                 <a:ea typeface="Microsoft YaHei"/>
+                <a:cs typeface="Microsoft YaHei"/>
               </a:rPr>
               <a:t>86%</a:t>
             </a:r>
@@ -3410,14 +3452,21 @@
               <a:lnSpc>
                 <a:spcPct val="112000"/>
               </a:lnSpc>
+              <a:spcBef>
+                <a:spcPts val="0"/>
+              </a:spcBef>
+              <a:spcAft>
+                <a:spcPts val="0"/>
+              </a:spcAft>
             </a:pPr>
             <a:r>
-              <a:rPr sz="1100" b="1" i="0">
+              <a:rPr sz="1100" b="1" i="0" lang="zh-CN" altLang="zh-CN">
                 <a:solidFill>
                   <a:srgbClr val="00B050"/>
                 </a:solidFill>
                 <a:latin typeface="Microsoft YaHei"/>
                 <a:ea typeface="Microsoft YaHei"/>
+                <a:cs typeface="Microsoft YaHei"/>
               </a:rPr>
               <a:t>▲ +23pp 同比</a:t>
             </a:r>
@@ -3486,14 +3535,21 @@
               <a:lnSpc>
                 <a:spcPct val="112000"/>
               </a:lnSpc>
+              <a:spcBef>
+                <a:spcPts val="0"/>
+              </a:spcBef>
+              <a:spcAft>
+                <a:spcPts val="0"/>
+              </a:spcAft>
             </a:pPr>
             <a:r>
-              <a:rPr sz="900" b="0" i="0">
+              <a:rPr sz="900" b="0" i="0" lang="zh-CN" altLang="zh-CN">
                 <a:solidFill>
                   <a:srgbClr val="595959"/>
                 </a:solidFill>
                 <a:latin typeface="Microsoft YaHei"/>
                 <a:ea typeface="Microsoft YaHei"/>
+                <a:cs typeface="Microsoft YaHei"/>
               </a:rPr>
               <a:t>口径: 全网例行工单</a:t>
             </a:r>
@@ -3542,7 +3598,14 @@
           <a:bodyPr rtlCol="0" anchor="ctr"/>
           <a:lstStyle/>
           <a:p>
-            <a:pPr algn="ctr"/>
+            <a:pPr algn="ctr">
+              <a:spcBef>
+                <a:spcPts val="0"/>
+              </a:spcBef>
+              <a:spcAft>
+                <a:spcPts val="0"/>
+              </a:spcAft>
+            </a:pPr>
           </a:p>
         </p:txBody>
       </p:sp>
@@ -3554,8 +3617,8 @@
         </p:nvSpPr>
         <p:spPr>
           <a:xfrm>
-            <a:off x="3378200" y="914400"/>
-            <a:ext cx="2540000" cy="177800"/>
+            <a:off x="3378200" y="897191"/>
+            <a:ext cx="2540000" cy="212217"/>
           </a:xfrm>
           <a:prstGeom prst="rect">
             <a:avLst/>
@@ -3572,14 +3635,21 @@
               <a:lnSpc>
                 <a:spcPct val="112000"/>
               </a:lnSpc>
+              <a:spcBef>
+                <a:spcPts val="0"/>
+              </a:spcBef>
+              <a:spcAft>
+                <a:spcPts val="0"/>
+              </a:spcAft>
             </a:pPr>
             <a:r>
-              <a:rPr sz="1200" b="0" i="0">
+              <a:rPr sz="1200" b="0" i="0" lang="zh-CN" altLang="zh-CN">
                 <a:solidFill>
                   <a:srgbClr val="595959"/>
                 </a:solidFill>
                 <a:latin typeface="Microsoft YaHei"/>
                 <a:ea typeface="Microsoft YaHei"/>
+                <a:cs typeface="Microsoft YaHei"/>
               </a:rPr>
               <a:t>平均处理时长</a:t>
             </a:r>
@@ -3594,8 +3664,8 @@
         </p:nvSpPr>
         <p:spPr>
           <a:xfrm>
-            <a:off x="3378200" y="1104900"/>
-            <a:ext cx="2540000" cy="431800"/>
+            <a:off x="3378200" y="1072324"/>
+            <a:ext cx="2540000" cy="496951"/>
           </a:xfrm>
           <a:prstGeom prst="rect">
             <a:avLst/>
@@ -3612,14 +3682,21 @@
               <a:lnSpc>
                 <a:spcPct val="112000"/>
               </a:lnSpc>
+              <a:spcBef>
+                <a:spcPts val="0"/>
+              </a:spcBef>
+              <a:spcAft>
+                <a:spcPts val="0"/>
+              </a:spcAft>
             </a:pPr>
             <a:r>
-              <a:rPr sz="3000" b="1" i="0">
+              <a:rPr sz="3000" b="1" i="0" lang="zh-CN" altLang="zh-CN">
                 <a:solidFill>
                   <a:srgbClr val="1F4E79"/>
                 </a:solidFill>
                 <a:latin typeface="Microsoft YaHei"/>
                 <a:ea typeface="Microsoft YaHei"/>
+                <a:cs typeface="Microsoft YaHei"/>
               </a:rPr>
               <a:t>4.2min</a:t>
             </a:r>
@@ -3652,14 +3729,21 @@
               <a:lnSpc>
                 <a:spcPct val="112000"/>
               </a:lnSpc>
+              <a:spcBef>
+                <a:spcPts val="0"/>
+              </a:spcBef>
+              <a:spcAft>
+                <a:spcPts val="0"/>
+              </a:spcAft>
             </a:pPr>
             <a:r>
-              <a:rPr sz="1100" b="1" i="0">
+              <a:rPr sz="1100" b="1" i="0" lang="zh-CN" altLang="zh-CN">
                 <a:solidFill>
                   <a:srgbClr val="B90A0A"/>
                 </a:solidFill>
                 <a:latin typeface="Microsoft YaHei"/>
                 <a:ea typeface="Microsoft YaHei"/>
+                <a:cs typeface="Microsoft YaHei"/>
               </a:rPr>
               <a:t>▼ -58% 环比</a:t>
             </a:r>
@@ -3728,14 +3812,21 @@
               <a:lnSpc>
                 <a:spcPct val="112000"/>
               </a:lnSpc>
+              <a:spcBef>
+                <a:spcPts val="0"/>
+              </a:spcBef>
+              <a:spcAft>
+                <a:spcPts val="0"/>
+              </a:spcAft>
             </a:pPr>
             <a:r>
-              <a:rPr sz="900" b="0" i="0">
+              <a:rPr sz="900" b="0" i="0" lang="zh-CN" altLang="zh-CN">
                 <a:solidFill>
                   <a:srgbClr val="595959"/>
                 </a:solidFill>
                 <a:latin typeface="Microsoft YaHei"/>
                 <a:ea typeface="Microsoft YaHei"/>
+                <a:cs typeface="Microsoft YaHei"/>
               </a:rPr>
               <a:t>口径: 派单→闭环全程</a:t>
             </a:r>
@@ -3784,7 +3875,14 @@
           <a:bodyPr rtlCol="0" anchor="ctr"/>
           <a:lstStyle/>
           <a:p>
-            <a:pPr algn="ctr"/>
+            <a:pPr algn="ctr">
+              <a:spcBef>
+                <a:spcPts val="0"/>
+              </a:spcBef>
+              <a:spcAft>
+                <a:spcPts val="0"/>
+              </a:spcAft>
+            </a:pPr>
           </a:p>
         </p:txBody>
       </p:sp>
@@ -3796,8 +3894,8 @@
         </p:nvSpPr>
         <p:spPr>
           <a:xfrm>
-            <a:off x="6273800" y="914400"/>
-            <a:ext cx="2540000" cy="177800"/>
+            <a:off x="6273800" y="897191"/>
+            <a:ext cx="2540000" cy="212217"/>
           </a:xfrm>
           <a:prstGeom prst="rect">
             <a:avLst/>
@@ -3814,14 +3912,21 @@
               <a:lnSpc>
                 <a:spcPct val="112000"/>
               </a:lnSpc>
+              <a:spcBef>
+                <a:spcPts val="0"/>
+              </a:spcBef>
+              <a:spcAft>
+                <a:spcPts val="0"/>
+              </a:spcAft>
             </a:pPr>
             <a:r>
-              <a:rPr sz="1200" b="0" i="0">
+              <a:rPr sz="1200" b="0" i="0" lang="zh-CN" altLang="zh-CN">
                 <a:solidFill>
                   <a:srgbClr val="595959"/>
                 </a:solidFill>
                 <a:latin typeface="Microsoft YaHei"/>
                 <a:ea typeface="Microsoft YaHei"/>
+                <a:cs typeface="Microsoft YaHei"/>
               </a:rPr>
               <a:t>故障预测准确率</a:t>
             </a:r>
@@ -3836,8 +3941,8 @@
         </p:nvSpPr>
         <p:spPr>
           <a:xfrm>
-            <a:off x="6273800" y="1104900"/>
-            <a:ext cx="2540000" cy="431800"/>
+            <a:off x="6273800" y="1072324"/>
+            <a:ext cx="2540000" cy="496951"/>
           </a:xfrm>
           <a:prstGeom prst="rect">
             <a:avLst/>
@@ -3854,14 +3959,21 @@
               <a:lnSpc>
                 <a:spcPct val="112000"/>
               </a:lnSpc>
+              <a:spcBef>
+                <a:spcPts val="0"/>
+              </a:spcBef>
+              <a:spcAft>
+                <a:spcPts val="0"/>
+              </a:spcAft>
             </a:pPr>
             <a:r>
-              <a:rPr sz="3000" b="1" i="0">
+              <a:rPr sz="3000" b="1" i="0" lang="zh-CN" altLang="zh-CN">
                 <a:solidFill>
                   <a:srgbClr val="1F4E79"/>
                 </a:solidFill>
                 <a:latin typeface="Microsoft YaHei"/>
                 <a:ea typeface="Microsoft YaHei"/>
+                <a:cs typeface="Microsoft YaHei"/>
               </a:rPr>
               <a:t>92.3%</a:t>
             </a:r>
@@ -3894,14 +4006,21 @@
               <a:lnSpc>
                 <a:spcPct val="112000"/>
               </a:lnSpc>
+              <a:spcBef>
+                <a:spcPts val="0"/>
+              </a:spcBef>
+              <a:spcAft>
+                <a:spcPts val="0"/>
+              </a:spcAft>
             </a:pPr>
             <a:r>
-              <a:rPr sz="1100" b="1" i="0">
+              <a:rPr sz="1100" b="1" i="0" lang="zh-CN" altLang="zh-CN">
                 <a:solidFill>
                   <a:srgbClr val="00B050"/>
                 </a:solidFill>
                 <a:latin typeface="Microsoft YaHei"/>
                 <a:ea typeface="Microsoft YaHei"/>
+                <a:cs typeface="Microsoft YaHei"/>
               </a:rPr>
               <a:t>▲ +6.8pp 同比</a:t>
             </a:r>
@@ -3970,14 +4089,21 @@
               <a:lnSpc>
                 <a:spcPct val="112000"/>
               </a:lnSpc>
+              <a:spcBef>
+                <a:spcPts val="0"/>
+              </a:spcBef>
+              <a:spcAft>
+                <a:spcPts val="0"/>
+              </a:spcAft>
             </a:pPr>
             <a:r>
-              <a:rPr sz="900" b="0" i="0">
+              <a:rPr sz="900" b="0" i="0" lang="zh-CN" altLang="zh-CN">
                 <a:solidFill>
                   <a:srgbClr val="595959"/>
                 </a:solidFill>
                 <a:latin typeface="Microsoft YaHei"/>
                 <a:ea typeface="Microsoft YaHei"/>
+                <a:cs typeface="Microsoft YaHei"/>
               </a:rPr>
               <a:t>口径: 提前 30min 预测</a:t>
             </a:r>
@@ -4026,7 +4152,14 @@
           <a:bodyPr rtlCol="0" anchor="ctr"/>
           <a:lstStyle/>
           <a:p>
-            <a:pPr algn="ctr"/>
+            <a:pPr algn="ctr">
+              <a:spcBef>
+                <a:spcPts val="0"/>
+              </a:spcBef>
+              <a:spcAft>
+                <a:spcPts val="0"/>
+              </a:spcAft>
+            </a:pPr>
           </a:p>
         </p:txBody>
       </p:sp>
@@ -4038,8 +4171,8 @@
         </p:nvSpPr>
         <p:spPr>
           <a:xfrm>
-            <a:off x="9169400" y="914400"/>
-            <a:ext cx="2540000" cy="177800"/>
+            <a:off x="9169400" y="897191"/>
+            <a:ext cx="2540000" cy="212217"/>
           </a:xfrm>
           <a:prstGeom prst="rect">
             <a:avLst/>
@@ -4056,14 +4189,21 @@
               <a:lnSpc>
                 <a:spcPct val="112000"/>
               </a:lnSpc>
+              <a:spcBef>
+                <a:spcPts val="0"/>
+              </a:spcBef>
+              <a:spcAft>
+                <a:spcPts val="0"/>
+              </a:spcAft>
             </a:pPr>
             <a:r>
-              <a:rPr sz="1200" b="0" i="0">
+              <a:rPr sz="1200" b="0" i="0" lang="zh-CN" altLang="zh-CN">
                 <a:solidFill>
                   <a:srgbClr val="595959"/>
                 </a:solidFill>
                 <a:latin typeface="Microsoft YaHei"/>
                 <a:ea typeface="Microsoft YaHei"/>
+                <a:cs typeface="Microsoft YaHei"/>
               </a:rPr>
               <a:t>运维人力投入</a:t>
             </a:r>
@@ -4078,8 +4218,8 @@
         </p:nvSpPr>
         <p:spPr>
           <a:xfrm>
-            <a:off x="9169400" y="1104900"/>
-            <a:ext cx="2540000" cy="431800"/>
+            <a:off x="9169400" y="1072324"/>
+            <a:ext cx="2540000" cy="496951"/>
           </a:xfrm>
           <a:prstGeom prst="rect">
             <a:avLst/>
@@ -4096,14 +4236,21 @@
               <a:lnSpc>
                 <a:spcPct val="112000"/>
               </a:lnSpc>
+              <a:spcBef>
+                <a:spcPts val="0"/>
+              </a:spcBef>
+              <a:spcAft>
+                <a:spcPts val="0"/>
+              </a:spcAft>
             </a:pPr>
             <a:r>
-              <a:rPr sz="3000" b="1" i="0">
+              <a:rPr sz="3000" b="1" i="0" lang="zh-CN" altLang="zh-CN">
                 <a:solidFill>
                   <a:srgbClr val="1F4E79"/>
                 </a:solidFill>
                 <a:latin typeface="Microsoft YaHei"/>
                 <a:ea typeface="Microsoft YaHei"/>
+                <a:cs typeface="Microsoft YaHei"/>
               </a:rPr>
               <a:t>31人</a:t>
             </a:r>
@@ -4136,14 +4283,21 @@
               <a:lnSpc>
                 <a:spcPct val="112000"/>
               </a:lnSpc>
+              <a:spcBef>
+                <a:spcPts val="0"/>
+              </a:spcBef>
+              <a:spcAft>
+                <a:spcPts val="0"/>
+              </a:spcAft>
             </a:pPr>
             <a:r>
-              <a:rPr sz="1100" b="1" i="0">
+              <a:rPr sz="1100" b="1" i="0" lang="zh-CN" altLang="zh-CN">
                 <a:solidFill>
                   <a:srgbClr val="B90A0A"/>
                 </a:solidFill>
                 <a:latin typeface="Microsoft YaHei"/>
                 <a:ea typeface="Microsoft YaHei"/>
+                <a:cs typeface="Microsoft YaHei"/>
               </a:rPr>
               <a:t>▼ -12人 同比</a:t>
             </a:r>
@@ -4212,14 +4366,21 @@
               <a:lnSpc>
                 <a:spcPct val="112000"/>
               </a:lnSpc>
+              <a:spcBef>
+                <a:spcPts val="0"/>
+              </a:spcBef>
+              <a:spcAft>
+                <a:spcPts val="0"/>
+              </a:spcAft>
             </a:pPr>
             <a:r>
-              <a:rPr sz="900" b="0" i="0">
+              <a:rPr sz="900" b="0" i="0" lang="zh-CN" altLang="zh-CN">
                 <a:solidFill>
                   <a:srgbClr val="595959"/>
                 </a:solidFill>
                 <a:latin typeface="Microsoft YaHei"/>
                 <a:ea typeface="Microsoft YaHei"/>
+                <a:cs typeface="Microsoft YaHei"/>
               </a:rPr>
               <a:t>口径: 运维编制全口径</a:t>
             </a:r>
@@ -4268,7 +4429,14 @@
           <a:bodyPr rtlCol="0" anchor="ctr"/>
           <a:lstStyle/>
           <a:p>
-            <a:pPr algn="ctr"/>
+            <a:pPr algn="ctr">
+              <a:spcBef>
+                <a:spcPts val="0"/>
+              </a:spcBef>
+              <a:spcAft>
+                <a:spcPts val="0"/>
+              </a:spcAft>
+            </a:pPr>
           </a:p>
         </p:txBody>
       </p:sp>
@@ -4312,7 +4480,14 @@
           <a:bodyPr rtlCol="0" anchor="ctr"/>
           <a:lstStyle/>
           <a:p>
-            <a:pPr algn="ctr"/>
+            <a:pPr algn="ctr">
+              <a:spcBef>
+                <a:spcPts val="0"/>
+              </a:spcBef>
+              <a:spcAft>
+                <a:spcPts val="0"/>
+              </a:spcAft>
+            </a:pPr>
           </a:p>
         </p:txBody>
       </p:sp>
@@ -4356,7 +4531,14 @@
           <a:bodyPr rtlCol="0" anchor="ctr"/>
           <a:lstStyle/>
           <a:p>
-            <a:pPr algn="ctr"/>
+            <a:pPr algn="ctr">
+              <a:spcBef>
+                <a:spcPts val="0"/>
+              </a:spcBef>
+              <a:spcAft>
+                <a:spcPts val="0"/>
+              </a:spcAft>
+            </a:pPr>
           </a:p>
         </p:txBody>
       </p:sp>
@@ -4386,14 +4568,21 @@
               <a:lnSpc>
                 <a:spcPct val="112000"/>
               </a:lnSpc>
+              <a:spcBef>
+                <a:spcPts val="0"/>
+              </a:spcBef>
+              <a:spcAft>
+                <a:spcPts val="0"/>
+              </a:spcAft>
             </a:pPr>
             <a:r>
-              <a:rPr sz="1500" b="1" i="0">
+              <a:rPr sz="1500" b="1" i="0" lang="zh-CN" altLang="zh-CN">
                 <a:solidFill>
                   <a:srgbClr val="262626"/>
                 </a:solidFill>
                 <a:latin typeface="Microsoft YaHei"/>
                 <a:ea typeface="Microsoft YaHei"/>
+                <a:cs typeface="Microsoft YaHei"/>
               </a:rPr>
               <a:t>趋势</a:t>
             </a:r>
@@ -4656,7 +4845,14 @@
           <a:bodyPr rtlCol="0" anchor="ctr"/>
           <a:lstStyle/>
           <a:p>
-            <a:pPr algn="ctr"/>
+            <a:pPr algn="ctr">
+              <a:spcBef>
+                <a:spcPts val="0"/>
+              </a:spcBef>
+              <a:spcAft>
+                <a:spcPts val="0"/>
+              </a:spcAft>
+            </a:pPr>
           </a:p>
         </p:txBody>
       </p:sp>
@@ -4668,8 +4864,8 @@
         </p:nvSpPr>
         <p:spPr>
           <a:xfrm>
-            <a:off x="736600" y="3240908"/>
-            <a:ext cx="304800" cy="127000"/>
+            <a:off x="735012" y="3218111"/>
+            <a:ext cx="307975" cy="172593"/>
           </a:xfrm>
           <a:prstGeom prst="rect">
             <a:avLst/>
@@ -4686,14 +4882,21 @@
               <a:lnSpc>
                 <a:spcPct val="112000"/>
               </a:lnSpc>
+              <a:spcBef>
+                <a:spcPts val="0"/>
+              </a:spcBef>
+              <a:spcAft>
+                <a:spcPts val="0"/>
+              </a:spcAft>
             </a:pPr>
             <a:r>
-              <a:rPr sz="950" b="0" i="0">
+              <a:rPr sz="950" b="0" i="0" lang="zh-CN" altLang="zh-CN">
                 <a:solidFill>
                   <a:srgbClr val="262626"/>
                 </a:solidFill>
                 <a:latin typeface="Microsoft YaHei"/>
                 <a:ea typeface="Microsoft YaHei"/>
+                <a:cs typeface="Microsoft YaHei"/>
               </a:rPr>
               <a:t>58%</a:t>
             </a:r>
@@ -4740,7 +4943,14 @@
           <a:bodyPr rtlCol="0" anchor="ctr"/>
           <a:lstStyle/>
           <a:p>
-            <a:pPr algn="ctr"/>
+            <a:pPr algn="ctr">
+              <a:spcBef>
+                <a:spcPts val="0"/>
+              </a:spcBef>
+              <a:spcAft>
+                <a:spcPts val="0"/>
+              </a:spcAft>
+            </a:pPr>
           </a:p>
         </p:txBody>
       </p:sp>
@@ -4752,8 +4962,8 @@
         </p:nvSpPr>
         <p:spPr>
           <a:xfrm>
-            <a:off x="1905000" y="3157074"/>
-            <a:ext cx="304800" cy="127000"/>
+            <a:off x="1903412" y="3134277"/>
+            <a:ext cx="307975" cy="172593"/>
           </a:xfrm>
           <a:prstGeom prst="rect">
             <a:avLst/>
@@ -4770,14 +4980,21 @@
               <a:lnSpc>
                 <a:spcPct val="112000"/>
               </a:lnSpc>
+              <a:spcBef>
+                <a:spcPts val="0"/>
+              </a:spcBef>
+              <a:spcAft>
+                <a:spcPts val="0"/>
+              </a:spcAft>
             </a:pPr>
             <a:r>
-              <a:rPr sz="950" b="0" i="0">
+              <a:rPr sz="950" b="0" i="0" lang="zh-CN" altLang="zh-CN">
                 <a:solidFill>
                   <a:srgbClr val="262626"/>
                 </a:solidFill>
                 <a:latin typeface="Microsoft YaHei"/>
                 <a:ea typeface="Microsoft YaHei"/>
+                <a:cs typeface="Microsoft YaHei"/>
               </a:rPr>
               <a:t>64%</a:t>
             </a:r>
@@ -4824,7 +5041,14 @@
           <a:bodyPr rtlCol="0" anchor="ctr"/>
           <a:lstStyle/>
           <a:p>
-            <a:pPr algn="ctr"/>
+            <a:pPr algn="ctr">
+              <a:spcBef>
+                <a:spcPts val="0"/>
+              </a:spcBef>
+              <a:spcAft>
+                <a:spcPts val="0"/>
+              </a:spcAft>
+            </a:pPr>
           </a:p>
         </p:txBody>
       </p:sp>
@@ -4836,8 +5060,8 @@
         </p:nvSpPr>
         <p:spPr>
           <a:xfrm>
-            <a:off x="3073400" y="3059268"/>
-            <a:ext cx="304800" cy="127000"/>
+            <a:off x="3071812" y="3036471"/>
+            <a:ext cx="307975" cy="172593"/>
           </a:xfrm>
           <a:prstGeom prst="rect">
             <a:avLst/>
@@ -4854,14 +5078,21 @@
               <a:lnSpc>
                 <a:spcPct val="112000"/>
               </a:lnSpc>
+              <a:spcBef>
+                <a:spcPts val="0"/>
+              </a:spcBef>
+              <a:spcAft>
+                <a:spcPts val="0"/>
+              </a:spcAft>
             </a:pPr>
             <a:r>
-              <a:rPr sz="950" b="0" i="0">
+              <a:rPr sz="950" b="0" i="0" lang="zh-CN" altLang="zh-CN">
                 <a:solidFill>
                   <a:srgbClr val="262626"/>
                 </a:solidFill>
                 <a:latin typeface="Microsoft YaHei"/>
                 <a:ea typeface="Microsoft YaHei"/>
+                <a:cs typeface="Microsoft YaHei"/>
               </a:rPr>
               <a:t>71%</a:t>
             </a:r>
@@ -4908,7 +5139,14 @@
           <a:bodyPr rtlCol="0" anchor="ctr"/>
           <a:lstStyle/>
           <a:p>
-            <a:pPr algn="ctr"/>
+            <a:pPr algn="ctr">
+              <a:spcBef>
+                <a:spcPts val="0"/>
+              </a:spcBef>
+              <a:spcAft>
+                <a:spcPts val="0"/>
+              </a:spcAft>
+            </a:pPr>
           </a:p>
         </p:txBody>
       </p:sp>
@@ -4920,8 +5158,8 @@
         </p:nvSpPr>
         <p:spPr>
           <a:xfrm>
-            <a:off x="4241800" y="2947490"/>
-            <a:ext cx="304800" cy="127000"/>
+            <a:off x="4240212" y="2924693"/>
+            <a:ext cx="307975" cy="172593"/>
           </a:xfrm>
           <a:prstGeom prst="rect">
             <a:avLst/>
@@ -4938,14 +5176,21 @@
               <a:lnSpc>
                 <a:spcPct val="112000"/>
               </a:lnSpc>
+              <a:spcBef>
+                <a:spcPts val="0"/>
+              </a:spcBef>
+              <a:spcAft>
+                <a:spcPts val="0"/>
+              </a:spcAft>
             </a:pPr>
             <a:r>
-              <a:rPr sz="950" b="0" i="0">
+              <a:rPr sz="950" b="0" i="0" lang="zh-CN" altLang="zh-CN">
                 <a:solidFill>
                   <a:srgbClr val="262626"/>
                 </a:solidFill>
                 <a:latin typeface="Microsoft YaHei"/>
                 <a:ea typeface="Microsoft YaHei"/>
+                <a:cs typeface="Microsoft YaHei"/>
               </a:rPr>
               <a:t>79%</a:t>
             </a:r>
@@ -4992,7 +5237,14 @@
           <a:bodyPr rtlCol="0" anchor="ctr"/>
           <a:lstStyle/>
           <a:p>
-            <a:pPr algn="ctr"/>
+            <a:pPr algn="ctr">
+              <a:spcBef>
+                <a:spcPts val="0"/>
+              </a:spcBef>
+              <a:spcAft>
+                <a:spcPts val="0"/>
+              </a:spcAft>
+            </a:pPr>
           </a:p>
         </p:txBody>
       </p:sp>
@@ -5004,8 +5256,8 @@
         </p:nvSpPr>
         <p:spPr>
           <a:xfrm>
-            <a:off x="5410200" y="2849684"/>
-            <a:ext cx="304800" cy="127000"/>
+            <a:off x="5408612" y="2826887"/>
+            <a:ext cx="307975" cy="172593"/>
           </a:xfrm>
           <a:prstGeom prst="rect">
             <a:avLst/>
@@ -5022,14 +5274,21 @@
               <a:lnSpc>
                 <a:spcPct val="112000"/>
               </a:lnSpc>
+              <a:spcBef>
+                <a:spcPts val="0"/>
+              </a:spcBef>
+              <a:spcAft>
+                <a:spcPts val="0"/>
+              </a:spcAft>
             </a:pPr>
             <a:r>
-              <a:rPr sz="950" b="0" i="0">
+              <a:rPr sz="950" b="0" i="0" lang="zh-CN" altLang="zh-CN">
                 <a:solidFill>
                   <a:srgbClr val="262626"/>
                 </a:solidFill>
                 <a:latin typeface="Microsoft YaHei"/>
                 <a:ea typeface="Microsoft YaHei"/>
+                <a:cs typeface="Microsoft YaHei"/>
               </a:rPr>
               <a:t>86%</a:t>
             </a:r>
@@ -5044,8 +5303,8 @@
         </p:nvSpPr>
         <p:spPr>
           <a:xfrm>
-            <a:off x="698500" y="4279900"/>
-            <a:ext cx="381000" cy="139700"/>
+            <a:off x="698500" y="4263453"/>
+            <a:ext cx="381000" cy="172593"/>
           </a:xfrm>
           <a:prstGeom prst="rect">
             <a:avLst/>
@@ -5062,14 +5321,21 @@
               <a:lnSpc>
                 <a:spcPct val="112000"/>
               </a:lnSpc>
+              <a:spcBef>
+                <a:spcPts val="0"/>
+              </a:spcBef>
+              <a:spcAft>
+                <a:spcPts val="0"/>
+              </a:spcAft>
             </a:pPr>
             <a:r>
-              <a:rPr sz="950" b="0" i="0">
+              <a:rPr sz="950" b="0" i="0" lang="zh-CN" altLang="zh-CN">
                 <a:solidFill>
                   <a:srgbClr val="595959"/>
                 </a:solidFill>
                 <a:latin typeface="Microsoft YaHei"/>
                 <a:ea typeface="Microsoft YaHei"/>
+                <a:cs typeface="Microsoft YaHei"/>
               </a:rPr>
               <a:t>1月</a:t>
             </a:r>
@@ -5084,8 +5350,8 @@
         </p:nvSpPr>
         <p:spPr>
           <a:xfrm>
-            <a:off x="1866899" y="4279900"/>
-            <a:ext cx="381000" cy="139700"/>
+            <a:off x="1866899" y="4263453"/>
+            <a:ext cx="381000" cy="172593"/>
           </a:xfrm>
           <a:prstGeom prst="rect">
             <a:avLst/>
@@ -5102,14 +5368,21 @@
               <a:lnSpc>
                 <a:spcPct val="112000"/>
               </a:lnSpc>
+              <a:spcBef>
+                <a:spcPts val="0"/>
+              </a:spcBef>
+              <a:spcAft>
+                <a:spcPts val="0"/>
+              </a:spcAft>
             </a:pPr>
             <a:r>
-              <a:rPr sz="950" b="0" i="0">
+              <a:rPr sz="950" b="0" i="0" lang="zh-CN" altLang="zh-CN">
                 <a:solidFill>
                   <a:srgbClr val="595959"/>
                 </a:solidFill>
                 <a:latin typeface="Microsoft YaHei"/>
                 <a:ea typeface="Microsoft YaHei"/>
+                <a:cs typeface="Microsoft YaHei"/>
               </a:rPr>
               <a:t>2月</a:t>
             </a:r>
@@ -5124,8 +5397,8 @@
         </p:nvSpPr>
         <p:spPr>
           <a:xfrm>
-            <a:off x="3035300" y="4279900"/>
-            <a:ext cx="381000" cy="139700"/>
+            <a:off x="3035300" y="4263453"/>
+            <a:ext cx="381000" cy="172593"/>
           </a:xfrm>
           <a:prstGeom prst="rect">
             <a:avLst/>
@@ -5142,14 +5415,21 @@
               <a:lnSpc>
                 <a:spcPct val="112000"/>
               </a:lnSpc>
+              <a:spcBef>
+                <a:spcPts val="0"/>
+              </a:spcBef>
+              <a:spcAft>
+                <a:spcPts val="0"/>
+              </a:spcAft>
             </a:pPr>
             <a:r>
-              <a:rPr sz="950" b="0" i="0">
+              <a:rPr sz="950" b="0" i="0" lang="zh-CN" altLang="zh-CN">
                 <a:solidFill>
                   <a:srgbClr val="595959"/>
                 </a:solidFill>
                 <a:latin typeface="Microsoft YaHei"/>
                 <a:ea typeface="Microsoft YaHei"/>
+                <a:cs typeface="Microsoft YaHei"/>
               </a:rPr>
               <a:t>3月</a:t>
             </a:r>
@@ -5164,8 +5444,8 @@
         </p:nvSpPr>
         <p:spPr>
           <a:xfrm>
-            <a:off x="4203700" y="4279900"/>
-            <a:ext cx="381000" cy="139700"/>
+            <a:off x="4203700" y="4263453"/>
+            <a:ext cx="381000" cy="172593"/>
           </a:xfrm>
           <a:prstGeom prst="rect">
             <a:avLst/>
@@ -5182,14 +5462,21 @@
               <a:lnSpc>
                 <a:spcPct val="112000"/>
               </a:lnSpc>
+              <a:spcBef>
+                <a:spcPts val="0"/>
+              </a:spcBef>
+              <a:spcAft>
+                <a:spcPts val="0"/>
+              </a:spcAft>
             </a:pPr>
             <a:r>
-              <a:rPr sz="950" b="0" i="0">
+              <a:rPr sz="950" b="0" i="0" lang="zh-CN" altLang="zh-CN">
                 <a:solidFill>
                   <a:srgbClr val="595959"/>
                 </a:solidFill>
                 <a:latin typeface="Microsoft YaHei"/>
                 <a:ea typeface="Microsoft YaHei"/>
+                <a:cs typeface="Microsoft YaHei"/>
               </a:rPr>
               <a:t>4月</a:t>
             </a:r>
@@ -5204,8 +5491,8 @@
         </p:nvSpPr>
         <p:spPr>
           <a:xfrm>
-            <a:off x="5372100" y="4279900"/>
-            <a:ext cx="381000" cy="139700"/>
+            <a:off x="5372100" y="4263453"/>
+            <a:ext cx="381000" cy="172593"/>
           </a:xfrm>
           <a:prstGeom prst="rect">
             <a:avLst/>
@@ -5222,14 +5509,21 @@
               <a:lnSpc>
                 <a:spcPct val="112000"/>
               </a:lnSpc>
+              <a:spcBef>
+                <a:spcPts val="0"/>
+              </a:spcBef>
+              <a:spcAft>
+                <a:spcPts val="0"/>
+              </a:spcAft>
             </a:pPr>
             <a:r>
-              <a:rPr sz="950" b="0" i="0">
+              <a:rPr sz="950" b="0" i="0" lang="zh-CN" altLang="zh-CN">
                 <a:solidFill>
                   <a:srgbClr val="595959"/>
                 </a:solidFill>
                 <a:latin typeface="Microsoft YaHei"/>
                 <a:ea typeface="Microsoft YaHei"/>
+                <a:cs typeface="Microsoft YaHei"/>
               </a:rPr>
               <a:t>5月</a:t>
             </a:r>
@@ -5299,14 +5593,21 @@
               <a:lnSpc>
                 <a:spcPct val="112000"/>
               </a:lnSpc>
+              <a:spcBef>
+                <a:spcPts val="0"/>
+              </a:spcBef>
+              <a:spcAft>
+                <a:spcPts val="0"/>
+              </a:spcAft>
             </a:pPr>
             <a:r>
-              <a:rPr sz="950" b="1" i="0">
+              <a:rPr sz="950" b="1" i="0" lang="zh-CN" altLang="zh-CN">
                 <a:solidFill>
                   <a:srgbClr val="B90A0A"/>
                 </a:solidFill>
                 <a:latin typeface="Microsoft YaHei"/>
                 <a:ea typeface="Microsoft YaHei"/>
+                <a:cs typeface="Microsoft YaHei"/>
               </a:rPr>
               <a:t>年度目标 85%</a:t>
             </a:r>
@@ -5339,14 +5640,21 @@
               <a:lnSpc>
                 <a:spcPct val="112000"/>
               </a:lnSpc>
+              <a:spcBef>
+                <a:spcPts val="0"/>
+              </a:spcBef>
+              <a:spcAft>
+                <a:spcPts val="0"/>
+              </a:spcAft>
             </a:pPr>
             <a:r>
-              <a:rPr sz="1200" b="1" i="0">
+              <a:rPr sz="1200" b="1" i="0" lang="zh-CN" altLang="zh-CN">
                 <a:solidFill>
                   <a:srgbClr val="262626"/>
                 </a:solidFill>
                 <a:latin typeface="Microsoft YaHei"/>
                 <a:ea typeface="Microsoft YaHei"/>
+                <a:cs typeface="Microsoft YaHei"/>
               </a:rPr>
               <a:t>自动处理率连续 5 个月环比提升, 5 月达 86%, 提前 2 个月达成年度目标</a:t>
             </a:r>
@@ -5395,7 +5703,14 @@
           <a:bodyPr rtlCol="0" anchor="ctr"/>
           <a:lstStyle/>
           <a:p>
-            <a:pPr algn="ctr"/>
+            <a:pPr algn="ctr">
+              <a:spcBef>
+                <a:spcPts val="0"/>
+              </a:spcBef>
+              <a:spcAft>
+                <a:spcPts val="0"/>
+              </a:spcAft>
+            </a:pPr>
           </a:p>
         </p:txBody>
       </p:sp>
@@ -5439,7 +5754,14 @@
           <a:bodyPr rtlCol="0" anchor="ctr"/>
           <a:lstStyle/>
           <a:p>
-            <a:pPr algn="ctr"/>
+            <a:pPr algn="ctr">
+              <a:spcBef>
+                <a:spcPts val="0"/>
+              </a:spcBef>
+              <a:spcAft>
+                <a:spcPts val="0"/>
+              </a:spcAft>
+            </a:pPr>
           </a:p>
         </p:txBody>
       </p:sp>
@@ -5483,7 +5805,14 @@
           <a:bodyPr rtlCol="0" anchor="ctr"/>
           <a:lstStyle/>
           <a:p>
-            <a:pPr algn="ctr"/>
+            <a:pPr algn="ctr">
+              <a:spcBef>
+                <a:spcPts val="0"/>
+              </a:spcBef>
+              <a:spcAft>
+                <a:spcPts val="0"/>
+              </a:spcAft>
+            </a:pPr>
           </a:p>
         </p:txBody>
       </p:sp>
@@ -5513,14 +5842,21 @@
               <a:lnSpc>
                 <a:spcPct val="112000"/>
               </a:lnSpc>
+              <a:spcBef>
+                <a:spcPts val="0"/>
+              </a:spcBef>
+              <a:spcAft>
+                <a:spcPts val="0"/>
+              </a:spcAft>
             </a:pPr>
             <a:r>
-              <a:rPr sz="1500" b="1" i="0">
+              <a:rPr sz="1500" b="1" i="0" lang="zh-CN" altLang="zh-CN">
                 <a:solidFill>
                   <a:srgbClr val="262626"/>
                 </a:solidFill>
                 <a:latin typeface="Microsoft YaHei"/>
                 <a:ea typeface="Microsoft YaHei"/>
+                <a:cs typeface="Microsoft YaHei"/>
               </a:rPr>
               <a:t>对比</a:t>
             </a:r>
@@ -5603,7 +5939,14 @@
           <a:bodyPr rtlCol="0" anchor="ctr"/>
           <a:lstStyle/>
           <a:p>
-            <a:pPr algn="ctr"/>
+            <a:pPr algn="ctr">
+              <a:spcBef>
+                <a:spcPts val="0"/>
+              </a:spcBef>
+              <a:spcAft>
+                <a:spcPts val="0"/>
+              </a:spcAft>
+            </a:pPr>
           </a:p>
         </p:txBody>
       </p:sp>
@@ -5615,8 +5958,8 @@
         </p:nvSpPr>
         <p:spPr>
           <a:xfrm>
-            <a:off x="6622203" y="2819400"/>
-            <a:ext cx="1634066" cy="139700"/>
+            <a:off x="6622203" y="2799016"/>
+            <a:ext cx="1634066" cy="180467"/>
           </a:xfrm>
           <a:prstGeom prst="rect">
             <a:avLst/>
@@ -5633,14 +5976,21 @@
               <a:lnSpc>
                 <a:spcPct val="112000"/>
               </a:lnSpc>
+              <a:spcBef>
+                <a:spcPts val="0"/>
+              </a:spcBef>
+              <a:spcAft>
+                <a:spcPts val="0"/>
+              </a:spcAft>
             </a:pPr>
             <a:r>
-              <a:rPr sz="1000" b="1" i="0">
+              <a:rPr sz="1000" b="1" i="0" lang="zh-CN" altLang="zh-CN">
                 <a:solidFill>
                   <a:srgbClr val="262626"/>
                 </a:solidFill>
                 <a:latin typeface="Microsoft YaHei"/>
                 <a:ea typeface="Microsoft YaHei"/>
+                <a:cs typeface="Microsoft YaHei"/>
               </a:rPr>
               <a:t>120min</a:t>
             </a:r>
@@ -5673,14 +6023,21 @@
               <a:lnSpc>
                 <a:spcPct val="112000"/>
               </a:lnSpc>
+              <a:spcBef>
+                <a:spcPts val="0"/>
+              </a:spcBef>
+              <a:spcAft>
+                <a:spcPts val="0"/>
+              </a:spcAft>
             </a:pPr>
             <a:r>
-              <a:rPr sz="950" b="0" i="0">
+              <a:rPr sz="950" b="0" i="0" lang="zh-CN" altLang="zh-CN">
                 <a:solidFill>
                   <a:srgbClr val="595959"/>
                 </a:solidFill>
                 <a:latin typeface="Microsoft YaHei"/>
                 <a:ea typeface="Microsoft YaHei"/>
+                <a:cs typeface="Microsoft YaHei"/>
               </a:rPr>
               <a:t/>
             </a:r>
@@ -5727,7 +6084,14 @@
           <a:bodyPr rtlCol="0" anchor="ctr"/>
           <a:lstStyle/>
           <a:p>
-            <a:pPr algn="ctr"/>
+            <a:pPr algn="ctr">
+              <a:spcBef>
+                <a:spcPts val="0"/>
+              </a:spcBef>
+              <a:spcAft>
+                <a:spcPts val="0"/>
+              </a:spcAft>
+            </a:pPr>
           </a:p>
         </p:txBody>
       </p:sp>
@@ -5739,8 +6103,8 @@
         </p:nvSpPr>
         <p:spPr>
           <a:xfrm>
-            <a:off x="8256270" y="3369733"/>
-            <a:ext cx="1634066" cy="139700"/>
+            <a:off x="8256270" y="3349349"/>
+            <a:ext cx="1634066" cy="180467"/>
           </a:xfrm>
           <a:prstGeom prst="rect">
             <a:avLst/>
@@ -5757,14 +6121,21 @@
               <a:lnSpc>
                 <a:spcPct val="112000"/>
               </a:lnSpc>
+              <a:spcBef>
+                <a:spcPts val="0"/>
+              </a:spcBef>
+              <a:spcAft>
+                <a:spcPts val="0"/>
+              </a:spcAft>
             </a:pPr>
             <a:r>
-              <a:rPr sz="1000" b="1" i="0">
+              <a:rPr sz="1000" b="1" i="0" lang="zh-CN" altLang="zh-CN">
                 <a:solidFill>
                   <a:srgbClr val="262626"/>
                 </a:solidFill>
                 <a:latin typeface="Microsoft YaHei"/>
                 <a:ea typeface="Microsoft YaHei"/>
+                <a:cs typeface="Microsoft YaHei"/>
               </a:rPr>
               <a:t>68min</a:t>
             </a:r>
@@ -5797,14 +6168,21 @@
               <a:lnSpc>
                 <a:spcPct val="112000"/>
               </a:lnSpc>
+              <a:spcBef>
+                <a:spcPts val="0"/>
+              </a:spcBef>
+              <a:spcAft>
+                <a:spcPts val="0"/>
+              </a:spcAft>
             </a:pPr>
             <a:r>
-              <a:rPr sz="950" b="0" i="0">
+              <a:rPr sz="950" b="0" i="0" lang="zh-CN" altLang="zh-CN">
                 <a:solidFill>
                   <a:srgbClr val="595959"/>
                 </a:solidFill>
                 <a:latin typeface="Microsoft YaHei"/>
                 <a:ea typeface="Microsoft YaHei"/>
+                <a:cs typeface="Microsoft YaHei"/>
               </a:rPr>
               <a:t/>
             </a:r>
@@ -5851,7 +6229,14 @@
           <a:bodyPr rtlCol="0" anchor="ctr"/>
           <a:lstStyle/>
           <a:p>
-            <a:pPr algn="ctr"/>
+            <a:pPr algn="ctr">
+              <a:spcBef>
+                <a:spcPts val="0"/>
+              </a:spcBef>
+              <a:spcAft>
+                <a:spcPts val="0"/>
+              </a:spcAft>
+            </a:pPr>
           </a:p>
         </p:txBody>
       </p:sp>
@@ -5863,8 +6248,8 @@
         </p:nvSpPr>
         <p:spPr>
           <a:xfrm>
-            <a:off x="9890336" y="3718983"/>
-            <a:ext cx="1634066" cy="139700"/>
+            <a:off x="9890336" y="3698599"/>
+            <a:ext cx="1634066" cy="180467"/>
           </a:xfrm>
           <a:prstGeom prst="rect">
             <a:avLst/>
@@ -5881,14 +6266,21 @@
               <a:lnSpc>
                 <a:spcPct val="112000"/>
               </a:lnSpc>
+              <a:spcBef>
+                <a:spcPts val="0"/>
+              </a:spcBef>
+              <a:spcAft>
+                <a:spcPts val="0"/>
+              </a:spcAft>
             </a:pPr>
             <a:r>
-              <a:rPr sz="1000" b="1" i="0">
+              <a:rPr sz="1000" b="1" i="0" lang="zh-CN" altLang="zh-CN">
                 <a:solidFill>
                   <a:srgbClr val="262626"/>
                 </a:solidFill>
                 <a:latin typeface="Microsoft YaHei"/>
                 <a:ea typeface="Microsoft YaHei"/>
+                <a:cs typeface="Microsoft YaHei"/>
               </a:rPr>
               <a:t>35min</a:t>
             </a:r>
@@ -5921,14 +6313,21 @@
               <a:lnSpc>
                 <a:spcPct val="112000"/>
               </a:lnSpc>
+              <a:spcBef>
+                <a:spcPts val="0"/>
+              </a:spcBef>
+              <a:spcAft>
+                <a:spcPts val="0"/>
+              </a:spcAft>
             </a:pPr>
             <a:r>
-              <a:rPr sz="950" b="0" i="0">
+              <a:rPr sz="950" b="0" i="0" lang="zh-CN" altLang="zh-CN">
                 <a:solidFill>
                   <a:srgbClr val="595959"/>
                 </a:solidFill>
                 <a:latin typeface="Microsoft YaHei"/>
                 <a:ea typeface="Microsoft YaHei"/>
+                <a:cs typeface="Microsoft YaHei"/>
               </a:rPr>
               <a:t/>
             </a:r>
@@ -5961,14 +6360,21 @@
               <a:lnSpc>
                 <a:spcPct val="112000"/>
               </a:lnSpc>
+              <a:spcBef>
+                <a:spcPts val="0"/>
+              </a:spcBef>
+              <a:spcAft>
+                <a:spcPts val="0"/>
+              </a:spcAft>
             </a:pPr>
             <a:r>
-              <a:rPr sz="950" b="0" i="0">
+              <a:rPr sz="950" b="0" i="0" lang="zh-CN" altLang="zh-CN">
                 <a:solidFill>
                   <a:srgbClr val="595959"/>
                 </a:solidFill>
                 <a:latin typeface="Microsoft YaHei"/>
                 <a:ea typeface="Microsoft YaHei"/>
+                <a:cs typeface="Microsoft YaHei"/>
               </a:rPr>
               <a:t>人工处理</a:t>
             </a:r>
@@ -6001,14 +6407,21 @@
               <a:lnSpc>
                 <a:spcPct val="112000"/>
               </a:lnSpc>
+              <a:spcBef>
+                <a:spcPts val="0"/>
+              </a:spcBef>
+              <a:spcAft>
+                <a:spcPts val="0"/>
+              </a:spcAft>
             </a:pPr>
             <a:r>
-              <a:rPr sz="950" b="0" i="0">
+              <a:rPr sz="950" b="0" i="0" lang="zh-CN" altLang="zh-CN">
                 <a:solidFill>
                   <a:srgbClr val="595959"/>
                 </a:solidFill>
                 <a:latin typeface="Microsoft YaHei"/>
                 <a:ea typeface="Microsoft YaHei"/>
+                <a:cs typeface="Microsoft YaHei"/>
               </a:rPr>
               <a:t>AI 辅助</a:t>
             </a:r>
@@ -6041,14 +6454,21 @@
               <a:lnSpc>
                 <a:spcPct val="112000"/>
               </a:lnSpc>
+              <a:spcBef>
+                <a:spcPts val="0"/>
+              </a:spcBef>
+              <a:spcAft>
+                <a:spcPts val="0"/>
+              </a:spcAft>
             </a:pPr>
             <a:r>
-              <a:rPr sz="950" b="0" i="0">
+              <a:rPr sz="950" b="0" i="0" lang="zh-CN" altLang="zh-CN">
                 <a:solidFill>
                   <a:srgbClr val="595959"/>
                 </a:solidFill>
                 <a:latin typeface="Microsoft YaHei"/>
                 <a:ea typeface="Microsoft YaHei"/>
+                <a:cs typeface="Microsoft YaHei"/>
               </a:rPr>
               <a:t>智能体全自动</a:t>
             </a:r>
@@ -6119,14 +6539,21 @@
               <a:lnSpc>
                 <a:spcPct val="112000"/>
               </a:lnSpc>
+              <a:spcBef>
+                <a:spcPts val="0"/>
+              </a:spcBef>
+              <a:spcAft>
+                <a:spcPts val="0"/>
+              </a:spcAft>
             </a:pPr>
             <a:r>
-              <a:rPr sz="1050" b="1" i="0">
+              <a:rPr sz="1050" b="1" i="0" lang="zh-CN" altLang="zh-CN">
                 <a:solidFill>
                   <a:srgbClr val="B90A0A"/>
                 </a:solidFill>
                 <a:latin typeface="Microsoft YaHei"/>
                 <a:ea typeface="Microsoft YaHei"/>
+                <a:cs typeface="Microsoft YaHei"/>
               </a:rPr>
               <a:t>处理时长 -71%</a:t>
             </a:r>
@@ -6159,14 +6586,21 @@
               <a:lnSpc>
                 <a:spcPct val="112000"/>
               </a:lnSpc>
+              <a:spcBef>
+                <a:spcPts val="0"/>
+              </a:spcBef>
+              <a:spcAft>
+                <a:spcPts val="0"/>
+              </a:spcAft>
             </a:pPr>
             <a:r>
-              <a:rPr sz="1200" b="1" i="0">
+              <a:rPr sz="1200" b="1" i="0" lang="zh-CN" altLang="zh-CN">
                 <a:solidFill>
                   <a:srgbClr val="262626"/>
                 </a:solidFill>
                 <a:latin typeface="Microsoft YaHei"/>
                 <a:ea typeface="Microsoft YaHei"/>
+                <a:cs typeface="Microsoft YaHei"/>
               </a:rPr>
               <a:t>智能体全自动模式较人工处理时长下降 71%, 较 AI 辅助模式再降 49%</a:t>
             </a:r>
@@ -6215,7 +6649,14 @@
           <a:bodyPr rtlCol="0" anchor="ctr"/>
           <a:lstStyle/>
           <a:p>
-            <a:pPr algn="ctr"/>
+            <a:pPr algn="ctr">
+              <a:spcBef>
+                <a:spcPts val="0"/>
+              </a:spcBef>
+              <a:spcAft>
+                <a:spcPts val="0"/>
+              </a:spcAft>
+            </a:pPr>
           </a:p>
         </p:txBody>
       </p:sp>
@@ -6259,7 +6700,14 @@
           <a:bodyPr rtlCol="0" anchor="ctr"/>
           <a:lstStyle/>
           <a:p>
-            <a:pPr algn="ctr"/>
+            <a:pPr algn="ctr">
+              <a:spcBef>
+                <a:spcPts val="0"/>
+              </a:spcBef>
+              <a:spcAft>
+                <a:spcPts val="0"/>
+              </a:spcAft>
+            </a:pPr>
           </a:p>
         </p:txBody>
       </p:sp>
@@ -6305,7 +6753,14 @@
           <a:bodyPr rtlCol="0" anchor="ctr"/>
           <a:lstStyle/>
           <a:p>
-            <a:pPr algn="ctr"/>
+            <a:pPr algn="ctr">
+              <a:spcBef>
+                <a:spcPts val="0"/>
+              </a:spcBef>
+              <a:spcAft>
+                <a:spcPts val="0"/>
+              </a:spcAft>
+            </a:pPr>
           </a:p>
         </p:txBody>
       </p:sp>
@@ -6335,14 +6790,21 @@
               <a:lnSpc>
                 <a:spcPct val="112000"/>
               </a:lnSpc>
+              <a:spcBef>
+                <a:spcPts val="0"/>
+              </a:spcBef>
+              <a:spcAft>
+                <a:spcPts val="0"/>
+              </a:spcAft>
             </a:pPr>
             <a:r>
-              <a:rPr sz="1900" b="1" i="0">
+              <a:rPr sz="1900" b="1" i="0" lang="zh-CN" altLang="zh-CN">
                 <a:solidFill>
                   <a:srgbClr val="1F4E79"/>
                 </a:solidFill>
                 <a:latin typeface="Microsoft YaHei"/>
                 <a:ea typeface="Microsoft YaHei"/>
+                <a:cs typeface="Microsoft YaHei"/>
               </a:rPr>
               <a:t>✓</a:t>
             </a:r>
@@ -6375,14 +6837,21 @@
               <a:lnSpc>
                 <a:spcPct val="112000"/>
               </a:lnSpc>
+              <a:spcBef>
+                <a:spcPts val="0"/>
+              </a:spcBef>
+              <a:spcAft>
+                <a:spcPts val="0"/>
+              </a:spcAft>
             </a:pPr>
             <a:r>
-              <a:rPr sz="1400" b="1" i="0">
+              <a:rPr sz="1400" b="1" i="0" lang="zh-CN" altLang="zh-CN">
                 <a:solidFill>
                   <a:srgbClr val="1F4E79"/>
                 </a:solidFill>
                 <a:latin typeface="Microsoft YaHei"/>
                 <a:ea typeface="Microsoft YaHei"/>
+                <a:cs typeface="Microsoft YaHei"/>
               </a:rPr>
               <a:t>数据</a:t>
             </a:r>
@@ -6392,14 +6861,21 @@
               <a:lnSpc>
                 <a:spcPct val="112000"/>
               </a:lnSpc>
+              <a:spcBef>
+                <a:spcPts val="0"/>
+              </a:spcBef>
+              <a:spcAft>
+                <a:spcPts val="0"/>
+              </a:spcAft>
             </a:pPr>
             <a:r>
-              <a:rPr sz="1400" b="1" i="0">
+              <a:rPr sz="1400" b="1" i="0" lang="zh-CN" altLang="zh-CN">
                 <a:solidFill>
                   <a:srgbClr val="1F4E79"/>
                 </a:solidFill>
                 <a:latin typeface="Microsoft YaHei"/>
                 <a:ea typeface="Microsoft YaHei"/>
+                <a:cs typeface="Microsoft YaHei"/>
               </a:rPr>
               <a:t>结论</a:t>
             </a:r>
@@ -6432,14 +6908,21 @@
               <a:lnSpc>
                 <a:spcPct val="112000"/>
               </a:lnSpc>
+              <a:spcBef>
+                <a:spcPts val="0"/>
+              </a:spcBef>
+              <a:spcAft>
+                <a:spcPts val="0"/>
+              </a:spcAft>
             </a:pPr>
             <a:r>
-              <a:rPr sz="1300" b="1" i="0">
+              <a:rPr sz="1300" b="1" i="0" lang="zh-CN" altLang="zh-CN">
                 <a:solidFill>
                   <a:srgbClr val="262626"/>
                 </a:solidFill>
                 <a:latin typeface="Microsoft YaHei"/>
                 <a:ea typeface="Microsoft YaHei"/>
+                <a:cs typeface="Microsoft YaHei"/>
               </a:rPr>
               <a:t>试点验证智能体可稳定承接 86% 例行工单, 建议 Q3 推广至全网 7 个区域</a:t>
             </a:r>
@@ -6449,14 +6932,21 @@
               <a:lnSpc>
                 <a:spcPct val="112000"/>
               </a:lnSpc>
+              <a:spcBef>
+                <a:spcPts val="0"/>
+              </a:spcBef>
+              <a:spcAft>
+                <a:spcPts val="0"/>
+              </a:spcAft>
             </a:pPr>
             <a:r>
-              <a:rPr sz="1300" b="1" i="0">
+              <a:rPr sz="1300" b="1" i="0" lang="zh-CN" altLang="zh-CN">
                 <a:solidFill>
                   <a:srgbClr val="262626"/>
                 </a:solidFill>
                 <a:latin typeface="Microsoft YaHei"/>
                 <a:ea typeface="Microsoft YaHei"/>
+                <a:cs typeface="Microsoft YaHei"/>
               </a:rPr>
               <a:t>预计全年节省运维人力成本 1200 万元, 故障恢复时长再降 30%</a:t>
             </a:r>
@@ -6503,7 +6993,14 @@
           <a:bodyPr rtlCol="0" anchor="ctr"/>
           <a:lstStyle/>
           <a:p>
-            <a:pPr algn="ctr"/>
+            <a:pPr algn="ctr">
+              <a:spcBef>
+                <a:spcPts val="0"/>
+              </a:spcBef>
+              <a:spcAft>
+                <a:spcPts val="0"/>
+              </a:spcAft>
+            </a:pPr>
           </a:p>
         </p:txBody>
       </p:sp>
@@ -6533,14 +7030,21 @@
               <a:lnSpc>
                 <a:spcPct val="112000"/>
               </a:lnSpc>
+              <a:spcBef>
+                <a:spcPts val="0"/>
+              </a:spcBef>
+              <a:spcAft>
+                <a:spcPts val="0"/>
+              </a:spcAft>
             </a:pPr>
             <a:r>
-              <a:rPr sz="1400" b="1" i="0">
+              <a:rPr sz="1400" b="1" i="0" lang="zh-CN" altLang="zh-CN">
                 <a:solidFill>
                   <a:srgbClr val="262626"/>
                 </a:solidFill>
                 <a:latin typeface="Microsoft YaHei"/>
                 <a:ea typeface="Microsoft YaHei"/>
+                <a:cs typeface="Microsoft YaHei"/>
               </a:rPr>
               <a:t>年节省 1200 万元</a:t>
             </a:r>
